--- a/public/ppt-beautify/covers/dark-modern.pptx
+++ b/public/ppt-beautify/covers/dark-modern.pptx
@@ -882,16 +882,16 @@
           <p:nvPr/>
         </p:nvSpPr>
         <p:spPr>
-          <a:xfrm>
-            <a:off x="0" y="4663440"/>
-            <a:ext cx="9144000" cy="502920"/>
+          <a:xfrm rot="1440000">
+            <a:off x="5029200" y="-731520"/>
+            <a:ext cx="5486400" cy="3200400"/>
           </a:xfrm>
           <a:prstGeom prst="rect">
             <a:avLst/>
           </a:prstGeom>
           <a:solidFill>
             <a:srgbClr val="38BDF8">
-              <a:alpha val="65000"/>
+              <a:alpha val="12000"/>
             </a:srgbClr>
           </a:solidFill>
           <a:ln/>
@@ -900,6 +900,26 @@
       <p:sp>
         <p:nvSpPr>
           <p:cNvPr id="3" name="Shape 1"/>
+          <p:cNvSpPr/>
+          <p:nvPr/>
+        </p:nvSpPr>
+        <p:spPr>
+          <a:xfrm>
+            <a:off x="0" y="4434840"/>
+            <a:ext cx="9144000" cy="54864"/>
+          </a:xfrm>
+          <a:prstGeom prst="rect">
+            <a:avLst/>
+          </a:prstGeom>
+          <a:solidFill>
+            <a:srgbClr val="38BDF8"/>
+          </a:solidFill>
+          <a:ln/>
+        </p:spPr>
+      </p:sp>
+      <p:sp>
+        <p:nvSpPr>
+          <p:cNvPr id="4" name="Shape 2"/>
           <p:cNvSpPr/>
           <p:nvPr/>
         </p:nvSpPr>
@@ -919,7 +939,7 @@
       </p:sp>
       <p:sp>
         <p:nvSpPr>
-          <p:cNvPr id="4" name="Text 2"/>
+          <p:cNvPr id="5" name="Text 3"/>
           <p:cNvSpPr/>
           <p:nvPr/>
         </p:nvSpPr>
@@ -938,11 +958,11 @@
           <a:bodyPr wrap="square" rtlCol="0" anchor="ctr"/>
           <a:lstStyle/>
           <a:p>
-            <a:pPr indent="0" marL="0">
+            <a:pPr algn="l" indent="0" marL="0">
               <a:buNone/>
             </a:pPr>
             <a:r>
-              <a:rPr lang="en-US" sz="3200" b="1" dirty="0">
+              <a:rPr lang="en-US" sz="3400" b="1" dirty="0">
                 <a:solidFill>
                   <a:srgbClr val="F8FAFC"/>
                 </a:solidFill>
@@ -950,21 +970,21 @@
                 <a:ea typeface="Microsoft YaHei" pitchFamily="34" charset="-122"/>
                 <a:cs typeface="Microsoft YaHei" pitchFamily="34" charset="-120"/>
               </a:rPr>
-              <a:t>在此填写主标题</a:t>
+              <a:t>CC_COVER_TITLE</a:t>
             </a:r>
-            <a:endParaRPr lang="en-US" sz="3200" dirty="0"/>
+            <a:endParaRPr lang="en-US" sz="3400" dirty="0"/>
           </a:p>
         </p:txBody>
       </p:sp>
       <p:sp>
         <p:nvSpPr>
-          <p:cNvPr id="5" name="Text 3"/>
+          <p:cNvPr id="6" name="Text 4"/>
           <p:cNvSpPr/>
           <p:nvPr/>
         </p:nvSpPr>
         <p:spPr>
           <a:xfrm>
-            <a:off x="502920" y="2697480"/>
+            <a:off x="502920" y="2788920"/>
             <a:ext cx="8046720" cy="685800"/>
           </a:xfrm>
           <a:prstGeom prst="rect">
@@ -977,7 +997,7 @@
           <a:bodyPr wrap="square" rtlCol="0" anchor="ctr"/>
           <a:lstStyle/>
           <a:p>
-            <a:pPr indent="0" marL="0">
+            <a:pPr algn="l" indent="0" marL="0">
               <a:buNone/>
             </a:pPr>
             <a:r>
@@ -989,7 +1009,7 @@
                 <a:ea typeface="Microsoft YaHei" pitchFamily="34" charset="-122"/>
                 <a:cs typeface="Microsoft YaHei" pitchFamily="34" charset="-120"/>
               </a:rPr>
-              <a:t>在此填写副标题</a:t>
+              <a:t>CC_COVER_SUBTITLE</a:t>
             </a:r>
             <a:endParaRPr lang="en-US" sz="1600" dirty="0"/>
           </a:p>
@@ -997,7 +1017,7 @@
       </p:sp>
       <p:sp>
         <p:nvSpPr>
-          <p:cNvPr id="6" name="Text 4"/>
+          <p:cNvPr id="7" name="Text 5"/>
           <p:cNvSpPr/>
           <p:nvPr/>
         </p:nvSpPr>
@@ -1028,7 +1048,7 @@
                 <a:ea typeface="Microsoft YaHei" pitchFamily="34" charset="-122"/>
                 <a:cs typeface="Microsoft YaHei" pitchFamily="34" charset="-120"/>
               </a:rPr>
-              <a:t>汇报人</a:t>
+              <a:t>CC_COVER_AUTHOR</a:t>
             </a:r>
             <a:endParaRPr lang="en-US" sz="1200" dirty="0"/>
           </a:p>
@@ -1036,7 +1056,7 @@
       </p:sp>
       <p:sp>
         <p:nvSpPr>
-          <p:cNvPr id="7" name="Text 5"/>
+          <p:cNvPr id="8" name="Text 6"/>
           <p:cNvSpPr/>
           <p:nvPr/>
         </p:nvSpPr>
@@ -1067,7 +1087,7 @@
                 <a:ea typeface="Microsoft YaHei" pitchFamily="34" charset="-122"/>
                 <a:cs typeface="Microsoft YaHei" pitchFamily="34" charset="-120"/>
               </a:rPr>
-              <a:t>2025.01.01</a:t>
+              <a:t>CC_COVER_DATE</a:t>
             </a:r>
             <a:endParaRPr lang="en-US" sz="1200" dirty="0"/>
           </a:p>
